--- a/presentation/Bank Marketing Who Subscribes.pptx
+++ b/presentation/Bank Marketing Who Subscribes.pptx
@@ -601,7 +601,7 @@
           <a:p>
             <a:r>
               <a:rPr lang="en-US" dirty="0"/>
-              <a:t>Time: 0:55 (total 6:50). The honest conclusion: the random test split flatters the model, because train and test come from the same periods. When I trained on the older calls and tested on the newer ones, it did worse than calling everyone. So I wouldn’t use it as it is for a new campaign. But the patterns are useful right away. With another week I’d validate by time, try a model without the economy columns, and get real costs from the bank to set the threshold with money.</a:t>
+              <a:t>Time: 0:55 (total 6:50). The honest conclusion: the random test split flatters the model, because train and test come from the same periods. When I trained on the older calls and tested on the newer ones, it did worse than calling everyone in that period. So I wouldn’t use it as it is for a new campaign. But the patterns are useful right away. With another week I’d test on later campaigns instead of a random split, keep the economy information but in a form that still works in a new period, and get real costs from the bank to set the threshold with money.</a:t>
             </a:r>
             <a:endParaRPr lang="en-US" dirty="0"/>
           </a:p>
@@ -1129,7 +1129,7 @@
           <a:p>
             <a:r>
               <a:rPr lang="en-US" dirty="0"/>
-              <a:t>Time: 0:45 (total 3:10). I compared four model families on exactly the same folds. Everything beats the baseline. Gradient boosting with balanced class weights is the best, logistic regression second, and the gap is bigger than the spread across the folds. I also tuned the two best ones, but the defaults were already as good, so I kept them.</a:t>
+              <a:t>Time: 0:50 (total 3:10). I compared four model families, and each one with six ways to handle the imbalance: nothing, class weights, copying yes clients, SMOTE, throwing away no clients, and cluster centroids. All on the same folds, each at its best threshold. Everything beats the baseline. Gradient boosting with class weights is best, logistic regression second; the gap is small, but gradient boosting wins on every single fold. The imbalance method hardly matters, only cluster centroids clearly hurts. I also tuned the two best ones, but the defaults were already as good, so I kept them.</a:t>
             </a:r>
             <a:endParaRPr lang="en-US" dirty="0"/>
           </a:p>
@@ -1217,7 +1217,7 @@
           <a:p>
             <a:r>
               <a:rPr lang="en-US" dirty="0"/>
-              <a:t>Time: 0:35 (total 3:45). With only 11% yes, the model has to be pushed to say yes more often. I compared class weights, SMOTE and doing nothing. At the default threshold the difference is big, but once you move the threshold they all end up at the same F1. So the threshold is what matters. I chose 0.60: F1 is almost at its best there, and since a missed customer is worse than a wasted call, I take the lower threshold that finds a few more of them.</a:t>
+              <a:t>Time: 0:35 (total 3:45). With only 11% yes, the model has to be pushed to say yes more often. Here are all six methods for gradient boosting. At the default threshold the difference is big, but once you move the threshold they all end up at the same F1, except cluster centroids, which throws away too much data. So the threshold is what matters. I chose 0.60: F1 is almost at its best there, and since a missed customer is worse than a wasted call, I take the lower threshold that finds a few more of them.</a:t>
             </a:r>
             <a:endParaRPr lang="en-US" dirty="0"/>
           </a:p>
@@ -2433,7 +2433,7 @@
                 <a:ea typeface="Arial" pitchFamily="34" charset="-122"/>
                 <a:cs typeface="Arial" pitchFamily="34" charset="-120"/>
               </a:rPr>
-              <a:t>, worse than calling everyone (0.468).</a:t>
+              <a:t>, worse than calling everyone in that period (0.468).</a:t>
             </a:r>
             <a:endParaRPr lang="en-US" sz="1800" dirty="0"/>
           </a:p>
@@ -2492,7 +2492,7 @@
         <p:spPr>
           <a:xfrm>
             <a:off x="889508" y="2984500"/>
-            <a:ext cx="5043424" cy="1212850"/>
+            <a:ext cx="5043424" cy="2011680"/>
           </a:xfrm>
           <a:prstGeom prst="rect">
             <a:avLst/>
@@ -2623,7 +2623,7 @@
         <p:spPr>
           <a:xfrm>
             <a:off x="6477508" y="2984500"/>
-            <a:ext cx="5043424" cy="1219200"/>
+            <a:ext cx="5043424" cy="2011680"/>
           </a:xfrm>
           <a:prstGeom prst="rect">
             <a:avLst/>
@@ -2653,7 +2653,7 @@
                 <a:ea typeface="Arial" pitchFamily="34" charset="-122"/>
                 <a:cs typeface="Arial" pitchFamily="34" charset="-120"/>
               </a:rPr>
-              <a:t>Validate by time, not randomly</a:t>
+              <a:t>Test on later campaigns instead of a random split</a:t>
             </a:r>
             <a:endParaRPr lang="en-US" sz="1600" dirty="0"/>
           </a:p>
@@ -2674,7 +2674,7 @@
                 <a:ea typeface="Arial" pitchFamily="34" charset="-122"/>
                 <a:cs typeface="Arial" pitchFamily="34" charset="-120"/>
               </a:rPr>
-              <a:t>A model without the economy columns</a:t>
+              <a:t>Keep the economy, but in a form that carries over to new periods (e.g. trends instead of exact values)</a:t>
             </a:r>
             <a:endParaRPr lang="en-US" sz="1600" dirty="0"/>
           </a:p>
@@ -4291,8 +4291,8 @@
         </p:nvSpPr>
         <p:spPr>
           <a:xfrm>
-            <a:off x="812800" y="1689100"/>
-            <a:ext cx="10883392" cy="711200"/>
+            <a:off x="812800" y="1691640"/>
+            <a:ext cx="5760720" cy="1051560"/>
           </a:xfrm>
           <a:prstGeom prst="rect">
             <a:avLst/>
@@ -4335,8 +4335,8 @@
         </p:nvSpPr>
         <p:spPr>
           <a:xfrm>
-            <a:off x="812800" y="2730500"/>
-            <a:ext cx="10883392" cy="330200"/>
+            <a:off x="812800" y="2880360"/>
+            <a:ext cx="5760720" cy="329184"/>
           </a:xfrm>
           <a:prstGeom prst="rect">
             <a:avLst/>
@@ -4379,8 +4379,8 @@
         </p:nvSpPr>
         <p:spPr>
           <a:xfrm>
-            <a:off x="882396" y="3187700"/>
-            <a:ext cx="10806176" cy="1270000"/>
+            <a:off x="882396" y="3291840"/>
+            <a:ext cx="5696712" cy="2743200"/>
           </a:xfrm>
           <a:prstGeom prst="rect">
             <a:avLst/>
@@ -4578,6 +4578,30 @@
           </a:p>
         </p:txBody>
       </p:sp>
+      <p:pic>
+        <p:nvPicPr>
+          <p:cNvPr id="7" name="Feature overview" descr="The columns of the dataset in five groups: client, this campaign's call, earlier campaigns, economy at call time, and the target y. duration, housing and loan are dropped; pdays becomes a yes/no flag."/>
+          <p:cNvPicPr>
+            <a:picLocks noChangeAspect="1"/>
+          </p:cNvPicPr>
+          <p:nvPr/>
+        </p:nvPicPr>
+        <p:blipFill>
+          <a:blip r:embed="rId3"/>
+          <a:stretch>
+            <a:fillRect/>
+          </a:stretch>
+        </p:blipFill>
+        <p:spPr>
+          <a:xfrm>
+            <a:off x="6949440" y="1691640"/>
+            <a:ext cx="4480560" cy="4049737"/>
+          </a:xfrm>
+          <a:prstGeom prst="rect">
+            <a:avLst/>
+          </a:prstGeom>
+        </p:spPr>
+      </p:pic>
     </p:spTree>
   </p:cSld>
   <p:clrMapOvr>
@@ -5118,7 +5142,7 @@
         <p:spPr>
           <a:xfrm>
             <a:off x="812800" y="1587500"/>
-            <a:ext cx="10883392" cy="304800"/>
+            <a:ext cx="10883392" cy="548640"/>
           </a:xfrm>
           <a:prstGeom prst="rect">
             <a:avLst/>
@@ -5147,7 +5171,7 @@
                 <a:ea typeface="Arial" pitchFamily="34" charset="-122"/>
                 <a:cs typeface="Arial" pitchFamily="34" charset="-120"/>
               </a:rPr>
-              <a:t>4 model families, same 5 folds, with and without class weights. Best of each:</a:t>
+              <a:t>4 model families × 6 ways to handle the 11% yes (none, class weights, random oversampling, SMOTE, random undersampling, cluster centroids), same 5 folds, each at its best threshold. Best of each:</a:t>
             </a:r>
             <a:endParaRPr lang="en-US" sz="1600" dirty="0"/>
           </a:p>
@@ -5168,17 +5192,18 @@
           </p:nvPr>
         </p:nvGraphicFramePr>
         <p:xfrm>
-          <a:off x="825500" y="2133600"/>
-          <a:ext cx="10553700" cy="2635448"/>
+          <a:off x="825500" y="2286000"/>
+          <a:ext cx="10552176" cy="2635448"/>
         </p:xfrm>
         <a:graphic>
           <a:graphicData uri="http://schemas.openxmlformats.org/drawingml/2006/table">
             <a:tbl>
               <a:tblPr/>
               <a:tblGrid>
-                <a:gridCol w="5804535"/>
-                <a:gridCol w="2638425"/>
-                <a:gridCol w="2110740"/>
+                <a:gridCol w="3108960"/>
+                <a:gridCol w="3108960"/>
+                <a:gridCol w="2514600"/>
+                <a:gridCol w="1819656"/>
               </a:tblGrid>
               <a:tr h="439241">
                 <a:tc>
@@ -5193,7 +5218,7 @@
                         <a:buNone/>
                       </a:pPr>
                       <a:r>
-                        <a:rPr lang="en-US" sz="1600" b="1" dirty="0">
+                        <a:rPr lang="en-US" sz="1600" dirty="0">
                           <a:solidFill>
                             <a:srgbClr val="111111"/>
                           </a:solidFill>
@@ -5257,6 +5282,77 @@
                     <a:bodyPr/>
                     <a:lstStyle/>
                     <a:p>
+                      <a:pPr indent="0" marL="0">
+                        <a:lnSpc>
+                          <a:spcPts val="2240"/>
+                        </a:lnSpc>
+                        <a:buNone/>
+                      </a:pPr>
+                      <a:r>
+                        <a:rPr lang="en-US" sz="1600" dirty="0">
+                          <a:solidFill>
+                            <a:srgbClr val="111111"/>
+                          </a:solidFill>
+                          <a:latin typeface="Arial" pitchFamily="34" charset="0"/>
+                          <a:ea typeface="Arial" pitchFamily="34" charset="-122"/>
+                          <a:cs typeface="Arial" pitchFamily="34" charset="-120"/>
+                        </a:rPr>
+                        <a:t>Imbalance handling</a:t>
+                      </a:r>
+                      <a:endParaRPr lang="en-US" sz="1600" dirty="0">
+                        <a:latin typeface="Arial" charset="0"/>
+                        <a:ea typeface="Arial" charset="0"/>
+                        <a:cs typeface="Arial" charset="0"/>
+                      </a:endParaRPr>
+                    </a:p>
+                  </a:txBody>
+                  <a:tcPr marL="71120" marR="71120" marT="71120" marB="71120" anchor="t">
+                    <a:lnL w="12700" cap="flat" cmpd="sng" algn="ctr">
+                      <a:solidFill>
+                        <a:srgbClr val="CBCBCB"/>
+                      </a:solidFill>
+                      <a:prstDash val="solid"/>
+                      <a:round/>
+                      <a:headEnd type="none" w="med" len="med"/>
+                      <a:tailEnd type="none" w="med" len="med"/>
+                    </a:lnL>
+                    <a:lnR w="12700" cap="flat" cmpd="sng" algn="ctr">
+                      <a:solidFill>
+                        <a:srgbClr val="BCBCBC"/>
+                      </a:solidFill>
+                      <a:prstDash val="solid"/>
+                      <a:round/>
+                      <a:headEnd type="none" w="med" len="med"/>
+                      <a:tailEnd type="none" w="med" len="med"/>
+                    </a:lnR>
+                    <a:lnT w="12700" cap="flat" cmpd="sng" algn="ctr">
+                      <a:solidFill>
+                        <a:srgbClr val="CBCBCB"/>
+                      </a:solidFill>
+                      <a:prstDash val="solid"/>
+                      <a:round/>
+                      <a:headEnd type="none" w="med" len="med"/>
+                      <a:tailEnd type="none" w="med" len="med"/>
+                    </a:lnT>
+                    <a:lnB w="12700" cap="flat" cmpd="sng" algn="ctr">
+                      <a:solidFill>
+                        <a:srgbClr val="BCBCBC"/>
+                      </a:solidFill>
+                      <a:prstDash val="solid"/>
+                      <a:round/>
+                      <a:headEnd type="none" w="med" len="med"/>
+                      <a:tailEnd type="none" w="med" len="med"/>
+                    </a:lnB>
+                    <a:solidFill>
+                      <a:srgbClr val="ECECEC"/>
+                    </a:solidFill>
+                  </a:tcPr>
+                </a:tc>
+                <a:tc>
+                  <a:txBody>
+                    <a:bodyPr/>
+                    <a:lstStyle/>
+                    <a:p>
                       <a:pPr algn="r" indent="0" marL="0">
                         <a:lnSpc>
                           <a:spcPts val="2240"/>
@@ -5264,7 +5360,7 @@
                         <a:buNone/>
                       </a:pPr>
                       <a:r>
-                        <a:rPr lang="en-US" sz="1600" b="1" dirty="0">
+                        <a:rPr lang="en-US" sz="1600" dirty="0">
                           <a:solidFill>
                             <a:srgbClr val="111111"/>
                           </a:solidFill>
@@ -5335,7 +5431,7 @@
                         <a:buNone/>
                       </a:pPr>
                       <a:r>
-                        <a:rPr lang="en-US" sz="1600" b="1" dirty="0">
+                        <a:rPr lang="en-US" sz="1600" dirty="0">
                           <a:solidFill>
                             <a:srgbClr val="111111"/>
                           </a:solidFill>
@@ -5416,7 +5512,75 @@
                           <a:ea typeface="Arial" pitchFamily="34" charset="-122"/>
                           <a:cs typeface="Arial" pitchFamily="34" charset="-120"/>
                         </a:rPr>
-                        <a:t>Gradient boosting, balanced</a:t>
+                        <a:t>Gradient boosting</a:t>
+                      </a:r>
+                      <a:endParaRPr lang="en-US" sz="1600" dirty="0">
+                        <a:latin typeface="Arial" charset="0"/>
+                        <a:ea typeface="Arial" charset="0"/>
+                        <a:cs typeface="Arial" charset="0"/>
+                      </a:endParaRPr>
+                    </a:p>
+                  </a:txBody>
+                  <a:tcPr marL="71120" marR="71120" marT="71120" marB="71120" anchor="t">
+                    <a:lnL w="12700" cap="flat" cmpd="sng" algn="ctr">
+                      <a:solidFill>
+                        <a:srgbClr val="CBCBCB"/>
+                      </a:solidFill>
+                      <a:prstDash val="solid"/>
+                      <a:round/>
+                      <a:headEnd type="none" w="med" len="med"/>
+                      <a:tailEnd type="none" w="med" len="med"/>
+                    </a:lnL>
+                    <a:lnR w="12700" cap="flat" cmpd="sng" algn="ctr">
+                      <a:solidFill>
+                        <a:srgbClr val="CBCBCB"/>
+                      </a:solidFill>
+                      <a:prstDash val="solid"/>
+                      <a:round/>
+                      <a:headEnd type="none" w="med" len="med"/>
+                      <a:tailEnd type="none" w="med" len="med"/>
+                    </a:lnR>
+                    <a:lnT w="12700" cap="flat" cmpd="sng" algn="ctr">
+                      <a:solidFill>
+                        <a:srgbClr val="BCBCBC"/>
+                      </a:solidFill>
+                      <a:prstDash val="solid"/>
+                      <a:round/>
+                      <a:headEnd type="none" w="med" len="med"/>
+                      <a:tailEnd type="none" w="med" len="med"/>
+                    </a:lnT>
+                    <a:lnB w="12700" cap="flat" cmpd="sng" algn="ctr">
+                      <a:solidFill>
+                        <a:srgbClr val="CBCBCB"/>
+                      </a:solidFill>
+                      <a:prstDash val="solid"/>
+                      <a:round/>
+                      <a:headEnd type="none" w="med" len="med"/>
+                      <a:tailEnd type="none" w="med" len="med"/>
+                    </a:lnB>
+                  </a:tcPr>
+                </a:tc>
+                <a:tc>
+                  <a:txBody>
+                    <a:bodyPr/>
+                    <a:lstStyle/>
+                    <a:p>
+                      <a:pPr indent="0" marL="0">
+                        <a:lnSpc>
+                          <a:spcPts val="2240"/>
+                        </a:lnSpc>
+                        <a:buNone/>
+                      </a:pPr>
+                      <a:r>
+                        <a:rPr lang="en-US" sz="1600" dirty="0">
+                          <a:solidFill>
+                            <a:srgbClr val="111111"/>
+                          </a:solidFill>
+                          <a:latin typeface="Arial" pitchFamily="34" charset="0"/>
+                          <a:ea typeface="Arial" pitchFamily="34" charset="-122"/>
+                          <a:cs typeface="Arial" pitchFamily="34" charset="-120"/>
+                        </a:rPr>
+                        <a:t>class weights</a:t>
                       </a:r>
                       <a:endParaRPr lang="en-US" sz="1600" dirty="0">
                         <a:latin typeface="Arial" charset="0"/>
@@ -5484,7 +5648,7 @@
                           <a:ea typeface="Arial" pitchFamily="34" charset="-122"/>
                           <a:cs typeface="Arial" pitchFamily="34" charset="-120"/>
                         </a:rPr>
-                        <a:t>0.476 ± 0.010</a:t>
+                        <a:t>0.499 ± 0.014</a:t>
                       </a:r>
                       <a:endParaRPr lang="en-US" sz="1600" dirty="0">
                         <a:latin typeface="Arial" charset="0"/>
@@ -5552,7 +5716,7 @@
                           <a:ea typeface="Arial" pitchFamily="34" charset="-122"/>
                           <a:cs typeface="Arial" pitchFamily="34" charset="-120"/>
                         </a:rPr>
-                        <a:t>63%</a:t>
+                        <a:t>57%</a:t>
                       </a:r>
                       <a:endParaRPr lang="en-US" sz="1600" dirty="0">
                         <a:latin typeface="Arial" charset="0"/>
@@ -5622,7 +5786,75 @@
                           <a:ea typeface="Arial" pitchFamily="34" charset="-122"/>
                           <a:cs typeface="Arial" pitchFamily="34" charset="-120"/>
                         </a:rPr>
-                        <a:t>Logistic regression, balanced</a:t>
+                        <a:t>Logistic regression</a:t>
+                      </a:r>
+                      <a:endParaRPr lang="en-US" sz="1600" dirty="0">
+                        <a:latin typeface="Arial" charset="0"/>
+                        <a:ea typeface="Arial" charset="0"/>
+                        <a:cs typeface="Arial" charset="0"/>
+                      </a:endParaRPr>
+                    </a:p>
+                  </a:txBody>
+                  <a:tcPr marL="71120" marR="71120" marT="71120" marB="71120" anchor="t">
+                    <a:lnL w="12700" cap="flat" cmpd="sng" algn="ctr">
+                      <a:solidFill>
+                        <a:srgbClr val="CBCBCB"/>
+                      </a:solidFill>
+                      <a:prstDash val="solid"/>
+                      <a:round/>
+                      <a:headEnd type="none" w="med" len="med"/>
+                      <a:tailEnd type="none" w="med" len="med"/>
+                    </a:lnL>
+                    <a:lnR w="12700" cap="flat" cmpd="sng" algn="ctr">
+                      <a:solidFill>
+                        <a:srgbClr val="CBCBCB"/>
+                      </a:solidFill>
+                      <a:prstDash val="solid"/>
+                      <a:round/>
+                      <a:headEnd type="none" w="med" len="med"/>
+                      <a:tailEnd type="none" w="med" len="med"/>
+                    </a:lnR>
+                    <a:lnT w="12700" cap="flat" cmpd="sng" algn="ctr">
+                      <a:solidFill>
+                        <a:srgbClr val="CBCBCB"/>
+                      </a:solidFill>
+                      <a:prstDash val="solid"/>
+                      <a:round/>
+                      <a:headEnd type="none" w="med" len="med"/>
+                      <a:tailEnd type="none" w="med" len="med"/>
+                    </a:lnT>
+                    <a:lnB w="12700" cap="flat" cmpd="sng" algn="ctr">
+                      <a:solidFill>
+                        <a:srgbClr val="CBCBCB"/>
+                      </a:solidFill>
+                      <a:prstDash val="solid"/>
+                      <a:round/>
+                      <a:headEnd type="none" w="med" len="med"/>
+                      <a:tailEnd type="none" w="med" len="med"/>
+                    </a:lnB>
+                  </a:tcPr>
+                </a:tc>
+                <a:tc>
+                  <a:txBody>
+                    <a:bodyPr/>
+                    <a:lstStyle/>
+                    <a:p>
+                      <a:pPr indent="0" marL="0">
+                        <a:lnSpc>
+                          <a:spcPts val="2240"/>
+                        </a:lnSpc>
+                        <a:buNone/>
+                      </a:pPr>
+                      <a:r>
+                        <a:rPr lang="en-US" sz="1600" dirty="0">
+                          <a:solidFill>
+                            <a:srgbClr val="111111"/>
+                          </a:solidFill>
+                          <a:latin typeface="Arial" pitchFamily="34" charset="0"/>
+                          <a:ea typeface="Arial" pitchFamily="34" charset="-122"/>
+                          <a:cs typeface="Arial" pitchFamily="34" charset="-120"/>
+                        </a:rPr>
+                        <a:t>random oversampling</a:t>
                       </a:r>
                       <a:endParaRPr lang="en-US" sz="1600" dirty="0">
                         <a:latin typeface="Arial" charset="0"/>
@@ -5690,7 +5922,7 @@
                           <a:ea typeface="Arial" pitchFamily="34" charset="-122"/>
                           <a:cs typeface="Arial" pitchFamily="34" charset="-120"/>
                         </a:rPr>
-                        <a:t>0.451 ± 0.009</a:t>
+                        <a:t>0.485 ± 0.012</a:t>
                       </a:r>
                       <a:endParaRPr lang="en-US" sz="1600" dirty="0">
                         <a:latin typeface="Arial" charset="0"/>
@@ -5758,7 +5990,7 @@
                           <a:ea typeface="Arial" pitchFamily="34" charset="-122"/>
                           <a:cs typeface="Arial" pitchFamily="34" charset="-120"/>
                         </a:rPr>
-                        <a:t>62%</a:t>
+                        <a:t>57%</a:t>
                       </a:r>
                       <a:endParaRPr lang="en-US" sz="1600" dirty="0">
                         <a:latin typeface="Arial" charset="0"/>
@@ -5881,7 +6113,7 @@
                     <a:bodyPr/>
                     <a:lstStyle/>
                     <a:p>
-                      <a:pPr algn="r" indent="0" marL="0">
+                      <a:pPr indent="0" marL="0">
                         <a:lnSpc>
                           <a:spcPts val="2240"/>
                         </a:lnSpc>
@@ -5896,7 +6128,7 @@
                           <a:ea typeface="Arial" pitchFamily="34" charset="-122"/>
                           <a:cs typeface="Arial" pitchFamily="34" charset="-120"/>
                         </a:rPr>
-                        <a:t>0.376 ± 0.003</a:t>
+                        <a:t>random undersampling</a:t>
                       </a:r>
                       <a:endParaRPr lang="en-US" sz="1600" dirty="0">
                         <a:latin typeface="Arial" charset="0"/>
@@ -5964,7 +6196,75 @@
                           <a:ea typeface="Arial" pitchFamily="34" charset="-122"/>
                           <a:cs typeface="Arial" pitchFamily="34" charset="-120"/>
                         </a:rPr>
-                        <a:t>30%</a:t>
+                        <a:t>0.466 ± 0.014</a:t>
+                      </a:r>
+                      <a:endParaRPr lang="en-US" sz="1600" dirty="0">
+                        <a:latin typeface="Arial" charset="0"/>
+                        <a:ea typeface="Arial" charset="0"/>
+                        <a:cs typeface="Arial" charset="0"/>
+                      </a:endParaRPr>
+                    </a:p>
+                  </a:txBody>
+                  <a:tcPr marL="71120" marR="71120" marT="71120" marB="71120" anchor="t">
+                    <a:lnL w="12700" cap="flat" cmpd="sng" algn="ctr">
+                      <a:solidFill>
+                        <a:srgbClr val="CBCBCB"/>
+                      </a:solidFill>
+                      <a:prstDash val="solid"/>
+                      <a:round/>
+                      <a:headEnd type="none" w="med" len="med"/>
+                      <a:tailEnd type="none" w="med" len="med"/>
+                    </a:lnL>
+                    <a:lnR w="12700" cap="flat" cmpd="sng" algn="ctr">
+                      <a:solidFill>
+                        <a:srgbClr val="CBCBCB"/>
+                      </a:solidFill>
+                      <a:prstDash val="solid"/>
+                      <a:round/>
+                      <a:headEnd type="none" w="med" len="med"/>
+                      <a:tailEnd type="none" w="med" len="med"/>
+                    </a:lnR>
+                    <a:lnT w="12700" cap="flat" cmpd="sng" algn="ctr">
+                      <a:solidFill>
+                        <a:srgbClr val="CBCBCB"/>
+                      </a:solidFill>
+                      <a:prstDash val="solid"/>
+                      <a:round/>
+                      <a:headEnd type="none" w="med" len="med"/>
+                      <a:tailEnd type="none" w="med" len="med"/>
+                    </a:lnT>
+                    <a:lnB w="12700" cap="flat" cmpd="sng" algn="ctr">
+                      <a:solidFill>
+                        <a:srgbClr val="CBCBCB"/>
+                      </a:solidFill>
+                      <a:prstDash val="solid"/>
+                      <a:round/>
+                      <a:headEnd type="none" w="med" len="med"/>
+                      <a:tailEnd type="none" w="med" len="med"/>
+                    </a:lnB>
+                  </a:tcPr>
+                </a:tc>
+                <a:tc>
+                  <a:txBody>
+                    <a:bodyPr/>
+                    <a:lstStyle/>
+                    <a:p>
+                      <a:pPr algn="r" indent="0" marL="0">
+                        <a:lnSpc>
+                          <a:spcPts val="2240"/>
+                        </a:lnSpc>
+                        <a:buNone/>
+                      </a:pPr>
+                      <a:r>
+                        <a:rPr lang="en-US" sz="1600" dirty="0">
+                          <a:solidFill>
+                            <a:srgbClr val="111111"/>
+                          </a:solidFill>
+                          <a:latin typeface="Arial" pitchFamily="34" charset="0"/>
+                          <a:ea typeface="Arial" pitchFamily="34" charset="-122"/>
+                          <a:cs typeface="Arial" pitchFamily="34" charset="-120"/>
+                        </a:rPr>
+                        <a:t>50%</a:t>
                       </a:r>
                       <a:endParaRPr lang="en-US" sz="1600" dirty="0">
                         <a:latin typeface="Arial" charset="0"/>
@@ -6087,7 +6387,7 @@
                     <a:bodyPr/>
                     <a:lstStyle/>
                     <a:p>
-                      <a:pPr algn="r" indent="0" marL="0">
+                      <a:pPr indent="0" marL="0">
                         <a:lnSpc>
                           <a:spcPts val="2240"/>
                         </a:lnSpc>
@@ -6102,7 +6402,7 @@
                           <a:ea typeface="Arial" pitchFamily="34" charset="-122"/>
                           <a:cs typeface="Arial" pitchFamily="34" charset="-120"/>
                         </a:rPr>
-                        <a:t>0.335 ± 0.011</a:t>
+                        <a:t>SMOTE</a:t>
                       </a:r>
                       <a:endParaRPr lang="en-US" sz="1600" dirty="0">
                         <a:latin typeface="Arial" charset="0"/>
@@ -6170,7 +6470,75 @@
                           <a:ea typeface="Arial" pitchFamily="34" charset="-122"/>
                           <a:cs typeface="Arial" pitchFamily="34" charset="-120"/>
                         </a:rPr>
-                        <a:t>34%</a:t>
+                        <a:t>0.338 ± 0.014</a:t>
+                      </a:r>
+                      <a:endParaRPr lang="en-US" sz="1600" dirty="0">
+                        <a:latin typeface="Arial" charset="0"/>
+                        <a:ea typeface="Arial" charset="0"/>
+                        <a:cs typeface="Arial" charset="0"/>
+                      </a:endParaRPr>
+                    </a:p>
+                  </a:txBody>
+                  <a:tcPr marL="71120" marR="71120" marT="71120" marB="71120" anchor="t">
+                    <a:lnL w="12700" cap="flat" cmpd="sng" algn="ctr">
+                      <a:solidFill>
+                        <a:srgbClr val="CBCBCB"/>
+                      </a:solidFill>
+                      <a:prstDash val="solid"/>
+                      <a:round/>
+                      <a:headEnd type="none" w="med" len="med"/>
+                      <a:tailEnd type="none" w="med" len="med"/>
+                    </a:lnL>
+                    <a:lnR w="12700" cap="flat" cmpd="sng" algn="ctr">
+                      <a:solidFill>
+                        <a:srgbClr val="CBCBCB"/>
+                      </a:solidFill>
+                      <a:prstDash val="solid"/>
+                      <a:round/>
+                      <a:headEnd type="none" w="med" len="med"/>
+                      <a:tailEnd type="none" w="med" len="med"/>
+                    </a:lnR>
+                    <a:lnT w="12700" cap="flat" cmpd="sng" algn="ctr">
+                      <a:solidFill>
+                        <a:srgbClr val="CBCBCB"/>
+                      </a:solidFill>
+                      <a:prstDash val="solid"/>
+                      <a:round/>
+                      <a:headEnd type="none" w="med" len="med"/>
+                      <a:tailEnd type="none" w="med" len="med"/>
+                    </a:lnT>
+                    <a:lnB w="12700" cap="flat" cmpd="sng" algn="ctr">
+                      <a:solidFill>
+                        <a:srgbClr val="CBCBCB"/>
+                      </a:solidFill>
+                      <a:prstDash val="solid"/>
+                      <a:round/>
+                      <a:headEnd type="none" w="med" len="med"/>
+                      <a:tailEnd type="none" w="med" len="med"/>
+                    </a:lnB>
+                  </a:tcPr>
+                </a:tc>
+                <a:tc>
+                  <a:txBody>
+                    <a:bodyPr/>
+                    <a:lstStyle/>
+                    <a:p>
+                      <a:pPr algn="r" indent="0" marL="0">
+                        <a:lnSpc>
+                          <a:spcPts val="2240"/>
+                        </a:lnSpc>
+                        <a:buNone/>
+                      </a:pPr>
+                      <a:r>
+                        <a:rPr lang="en-US" sz="1600" dirty="0">
+                          <a:solidFill>
+                            <a:srgbClr val="111111"/>
+                          </a:solidFill>
+                          <a:latin typeface="Arial" pitchFamily="34" charset="0"/>
+                          <a:ea typeface="Arial" pitchFamily="34" charset="-122"/>
+                          <a:cs typeface="Arial" pitchFamily="34" charset="-120"/>
+                        </a:rPr>
+                        <a:t>37%</a:t>
                       </a:r>
                       <a:endParaRPr lang="en-US" sz="1600" dirty="0">
                         <a:latin typeface="Arial" charset="0"/>
@@ -6293,6 +6661,74 @@
                     <a:bodyPr/>
                     <a:lstStyle/>
                     <a:p>
+                      <a:pPr indent="0" marL="0">
+                        <a:lnSpc>
+                          <a:spcPts val="2240"/>
+                        </a:lnSpc>
+                        <a:buNone/>
+                      </a:pPr>
+                      <a:r>
+                        <a:rPr lang="en-US" sz="1600" dirty="0">
+                          <a:solidFill>
+                            <a:srgbClr val="111111"/>
+                          </a:solidFill>
+                          <a:latin typeface="Arial" pitchFamily="34" charset="0"/>
+                          <a:ea typeface="Arial" pitchFamily="34" charset="-122"/>
+                          <a:cs typeface="Arial" pitchFamily="34" charset="-120"/>
+                        </a:rPr>
+                        <a:t/>
+                      </a:r>
+                      <a:endParaRPr lang="en-US" sz="1600" dirty="0">
+                        <a:latin typeface="Arial" charset="0"/>
+                        <a:ea typeface="Arial" charset="0"/>
+                        <a:cs typeface="Arial" charset="0"/>
+                      </a:endParaRPr>
+                    </a:p>
+                  </a:txBody>
+                  <a:tcPr marL="71120" marR="71120" marT="71120" marB="71120" anchor="t">
+                    <a:lnL w="12700" cap="flat" cmpd="sng" algn="ctr">
+                      <a:solidFill>
+                        <a:srgbClr val="CBCBCB"/>
+                      </a:solidFill>
+                      <a:prstDash val="solid"/>
+                      <a:round/>
+                      <a:headEnd type="none" w="med" len="med"/>
+                      <a:tailEnd type="none" w="med" len="med"/>
+                    </a:lnL>
+                    <a:lnR w="12700" cap="flat" cmpd="sng" algn="ctr">
+                      <a:solidFill>
+                        <a:srgbClr val="CBCBCB"/>
+                      </a:solidFill>
+                      <a:prstDash val="solid"/>
+                      <a:round/>
+                      <a:headEnd type="none" w="med" len="med"/>
+                      <a:tailEnd type="none" w="med" len="med"/>
+                    </a:lnR>
+                    <a:lnT w="12700" cap="flat" cmpd="sng" algn="ctr">
+                      <a:solidFill>
+                        <a:srgbClr val="CBCBCB"/>
+                      </a:solidFill>
+                      <a:prstDash val="solid"/>
+                      <a:round/>
+                      <a:headEnd type="none" w="med" len="med"/>
+                      <a:tailEnd type="none" w="med" len="med"/>
+                    </a:lnT>
+                    <a:lnB w="12700" cap="flat" cmpd="sng" algn="ctr">
+                      <a:solidFill>
+                        <a:srgbClr val="CBCBCB"/>
+                      </a:solidFill>
+                      <a:prstDash val="solid"/>
+                      <a:round/>
+                      <a:headEnd type="none" w="med" len="med"/>
+                      <a:tailEnd type="none" w="med" len="med"/>
+                    </a:lnB>
+                  </a:tcPr>
+                </a:tc>
+                <a:tc>
+                  <a:txBody>
+                    <a:bodyPr/>
+                    <a:lstStyle/>
+                    <a:p>
                       <a:pPr algn="r" indent="0" marL="0">
                         <a:lnSpc>
                           <a:spcPts val="2240"/>
@@ -6437,7 +6873,7 @@
         </p:nvSpPr>
         <p:spPr>
           <a:xfrm>
-            <a:off x="812800" y="5023048"/>
+            <a:off x="812800" y="5166360"/>
             <a:ext cx="10883392" cy="584200"/>
           </a:xfrm>
           <a:prstGeom prst="rect">
@@ -6467,7 +6903,7 @@
                 <a:ea typeface="Arial" pitchFamily="34" charset="-122"/>
                 <a:cs typeface="Arial" pitchFamily="34" charset="-120"/>
               </a:rPr>
-              <a:t>Tuning (grid / random search) didn’t beat the default settings. New features: only small changes, kept the simple ones.</a:t>
+              <a:t>The model family matters, the imbalance method hardly does: once the threshold is moved, every method except cluster centroids lands within the fold spread. Tuning didn’t beat the default settings.</a:t>
             </a:r>
             <a:endParaRPr lang="en-US" sz="1600" dirty="0"/>
           </a:p>
@@ -6589,7 +7025,7 @@
                 <a:ea typeface="Arial" pitchFamily="34" charset="-122"/>
                 <a:cs typeface="Arial" pitchFamily="34" charset="-120"/>
               </a:rPr>
-              <a:t>Three ways to handle the 11% yes, gradient boosting, cross-validated F1:</a:t>
+              <a:t>Gradient boosting, cross-validated F1 for each way to handle the 11% yes:</a:t>
             </a:r>
             <a:endParaRPr lang="en-US" sz="1800" dirty="0"/>
           </a:p>
@@ -6611,7 +7047,7 @@
         </p:nvGraphicFramePr>
         <p:xfrm>
           <a:off x="825500" y="2273300"/>
-          <a:ext cx="10553700" cy="1970484"/>
+          <a:ext cx="10553700" cy="2688336"/>
         </p:xfrm>
         <a:graphic>
           <a:graphicData uri="http://schemas.openxmlformats.org/drawingml/2006/table">
@@ -6622,7 +7058,7 @@
                 <a:gridCol w="3166110"/>
                 <a:gridCol w="3166110"/>
               </a:tblGrid>
-              <a:tr h="492621">
+              <a:tr h="384048">
                 <a:tc>
                   <a:txBody>
                     <a:bodyPr/>
@@ -6635,7 +7071,7 @@
                         <a:buNone/>
                       </a:pPr>
                       <a:r>
-                        <a:rPr lang="en-US" sz="1800" b="1" dirty="0">
+                        <a:rPr lang="en-US" sz="1600" b="1" dirty="0">
                           <a:solidFill>
                             <a:srgbClr val="111111"/>
                           </a:solidFill>
@@ -6652,7 +7088,7 @@
                       </a:endParaRPr>
                     </a:p>
                   </a:txBody>
-                  <a:tcPr marL="80010" marR="80010" marT="80010" marB="80010" anchor="t">
+                  <a:tcPr marL="80010" marR="80010" marT="36576" marB="36576" anchor="t">
                     <a:lnL w="12700" cap="flat" cmpd="sng" algn="ctr">
                       <a:solidFill>
                         <a:srgbClr val="CBCBCB"/>
@@ -6706,7 +7142,7 @@
                         <a:buNone/>
                       </a:pPr>
                       <a:r>
-                        <a:rPr lang="en-US" sz="1800" b="1" dirty="0">
+                        <a:rPr lang="en-US" sz="1600" b="1" dirty="0">
                           <a:solidFill>
                             <a:srgbClr val="111111"/>
                           </a:solidFill>
@@ -6723,7 +7159,7 @@
                       </a:endParaRPr>
                     </a:p>
                   </a:txBody>
-                  <a:tcPr marL="80010" marR="80010" marT="80010" marB="80010" anchor="t">
+                  <a:tcPr marL="80010" marR="80010" marT="36576" marB="36576" anchor="t">
                     <a:lnL w="12700" cap="flat" cmpd="sng" algn="ctr">
                       <a:solidFill>
                         <a:srgbClr val="BCBCBC"/>
@@ -6777,7 +7213,7 @@
                         <a:buNone/>
                       </a:pPr>
                       <a:r>
-                        <a:rPr lang="en-US" sz="1800" b="1" dirty="0">
+                        <a:rPr lang="en-US" sz="1600" b="1" dirty="0">
                           <a:solidFill>
                             <a:srgbClr val="111111"/>
                           </a:solidFill>
@@ -6794,7 +7230,7 @@
                       </a:endParaRPr>
                     </a:p>
                   </a:txBody>
-                  <a:tcPr marL="80010" marR="80010" marT="80010" marB="80010" anchor="t">
+                  <a:tcPr marL="80010" marR="80010" marT="36576" marB="36576" anchor="t">
                     <a:lnL w="12700" cap="flat" cmpd="sng" algn="ctr">
                       <a:solidFill>
                         <a:srgbClr val="BCBCBC"/>
@@ -6837,7 +7273,7 @@
                   </a:tcPr>
                 </a:tc>
               </a:tr>
-              <a:tr h="492621">
+              <a:tr h="384048">
                 <a:tc>
                   <a:txBody>
                     <a:bodyPr/>
@@ -6850,7 +7286,7 @@
                         <a:buNone/>
                       </a:pPr>
                       <a:r>
-                        <a:rPr lang="en-US" sz="1800" dirty="0">
+                        <a:rPr lang="en-US" sz="1600" dirty="0">
                           <a:solidFill>
                             <a:srgbClr val="111111"/>
                           </a:solidFill>
@@ -6867,7 +7303,7 @@
                       </a:endParaRPr>
                     </a:p>
                   </a:txBody>
-                  <a:tcPr marL="80010" marR="80010" marT="80010" marB="80010" anchor="t">
+                  <a:tcPr marL="80010" marR="80010" marT="36576" marB="36576" anchor="t">
                     <a:lnL w="12700" cap="flat" cmpd="sng" algn="ctr">
                       <a:solidFill>
                         <a:srgbClr val="CBCBCB"/>
@@ -6918,7 +7354,7 @@
                         <a:buNone/>
                       </a:pPr>
                       <a:r>
-                        <a:rPr lang="en-US" sz="1800" dirty="0">
+                        <a:rPr lang="en-US" sz="1600" dirty="0">
                           <a:solidFill>
                             <a:srgbClr val="111111"/>
                           </a:solidFill>
@@ -6935,7 +7371,7 @@
                       </a:endParaRPr>
                     </a:p>
                   </a:txBody>
-                  <a:tcPr marL="80010" marR="80010" marT="80010" marB="80010" anchor="t">
+                  <a:tcPr marL="80010" marR="80010" marT="36576" marB="36576" anchor="t">
                     <a:lnL w="12700" cap="flat" cmpd="sng" algn="ctr">
                       <a:solidFill>
                         <a:srgbClr val="CBCBCB"/>
@@ -6986,7 +7422,7 @@
                         <a:buNone/>
                       </a:pPr>
                       <a:r>
-                        <a:rPr lang="en-US" sz="1800" dirty="0">
+                        <a:rPr lang="en-US" sz="1600" dirty="0">
                           <a:solidFill>
                             <a:srgbClr val="111111"/>
                           </a:solidFill>
@@ -7003,7 +7439,7 @@
                       </a:endParaRPr>
                     </a:p>
                   </a:txBody>
-                  <a:tcPr marL="80010" marR="80010" marT="80010" marB="80010" anchor="t">
+                  <a:tcPr marL="80010" marR="80010" marT="36576" marB="36576" anchor="t">
                     <a:lnL w="12700" cap="flat" cmpd="sng" algn="ctr">
                       <a:solidFill>
                         <a:srgbClr val="CBCBCB"/>
@@ -7043,7 +7479,7 @@
                   </a:tcPr>
                 </a:tc>
               </a:tr>
-              <a:tr h="492621">
+              <a:tr h="384048">
                 <a:tc>
                   <a:txBody>
                     <a:bodyPr/>
@@ -7056,7 +7492,7 @@
                         <a:buNone/>
                       </a:pPr>
                       <a:r>
-                        <a:rPr lang="en-US" sz="1800" dirty="0">
+                        <a:rPr lang="en-US" sz="1600" dirty="0">
                           <a:solidFill>
                             <a:srgbClr val="111111"/>
                           </a:solidFill>
@@ -7073,7 +7509,7 @@
                       </a:endParaRPr>
                     </a:p>
                   </a:txBody>
-                  <a:tcPr marL="80010" marR="80010" marT="80010" marB="80010" anchor="t">
+                  <a:tcPr marL="80010" marR="80010" marT="36576" marB="36576" anchor="t">
                     <a:lnL w="12700" cap="flat" cmpd="sng" algn="ctr">
                       <a:solidFill>
                         <a:srgbClr val="CBCBCB"/>
@@ -7124,7 +7560,7 @@
                         <a:buNone/>
                       </a:pPr>
                       <a:r>
-                        <a:rPr lang="en-US" sz="1800" dirty="0">
+                        <a:rPr lang="en-US" sz="1600" dirty="0">
                           <a:solidFill>
                             <a:srgbClr val="111111"/>
                           </a:solidFill>
@@ -7141,7 +7577,7 @@
                       </a:endParaRPr>
                     </a:p>
                   </a:txBody>
-                  <a:tcPr marL="80010" marR="80010" marT="80010" marB="80010" anchor="t">
+                  <a:tcPr marL="80010" marR="80010" marT="36576" marB="36576" anchor="t">
                     <a:lnL w="12700" cap="flat" cmpd="sng" algn="ctr">
                       <a:solidFill>
                         <a:srgbClr val="CBCBCB"/>
@@ -7192,7 +7628,7 @@
                         <a:buNone/>
                       </a:pPr>
                       <a:r>
-                        <a:rPr lang="en-US" sz="1800" dirty="0">
+                        <a:rPr lang="en-US" sz="1600" dirty="0">
                           <a:solidFill>
                             <a:srgbClr val="111111"/>
                           </a:solidFill>
@@ -7209,7 +7645,7 @@
                       </a:endParaRPr>
                     </a:p>
                   </a:txBody>
-                  <a:tcPr marL="80010" marR="80010" marT="80010" marB="80010" anchor="t">
+                  <a:tcPr marL="80010" marR="80010" marT="36576" marB="36576" anchor="t">
                     <a:lnL w="12700" cap="flat" cmpd="sng" algn="ctr">
                       <a:solidFill>
                         <a:srgbClr val="CBCBCB"/>
@@ -7249,7 +7685,7 @@
                   </a:tcPr>
                 </a:tc>
               </a:tr>
-              <a:tr h="492621">
+              <a:tr h="384048">
                 <a:tc>
                   <a:txBody>
                     <a:bodyPr/>
@@ -7262,7 +7698,213 @@
                         <a:buNone/>
                       </a:pPr>
                       <a:r>
-                        <a:rPr lang="en-US" sz="1800" dirty="0">
+                        <a:rPr lang="en-US" sz="1600" dirty="0">
+                          <a:solidFill>
+                            <a:srgbClr val="111111"/>
+                          </a:solidFill>
+                          <a:latin typeface="Arial" pitchFamily="34" charset="0"/>
+                          <a:ea typeface="Arial" pitchFamily="34" charset="-122"/>
+                          <a:cs typeface="Arial" pitchFamily="34" charset="-120"/>
+                        </a:rPr>
+                        <a:t>Random oversampling</a:t>
+                      </a:r>
+                      <a:endParaRPr lang="en-US" sz="1800" dirty="0">
+                        <a:latin typeface="Arial" charset="0"/>
+                        <a:ea typeface="Arial" charset="0"/>
+                        <a:cs typeface="Arial" charset="0"/>
+                      </a:endParaRPr>
+                    </a:p>
+                  </a:txBody>
+                  <a:tcPr marL="80010" marR="80010" marT="36576" marB="36576" anchor="t">
+                    <a:lnL w="12700" cap="flat" cmpd="sng" algn="ctr">
+                      <a:solidFill>
+                        <a:srgbClr val="CBCBCB"/>
+                      </a:solidFill>
+                      <a:prstDash val="solid"/>
+                      <a:round/>
+                      <a:headEnd type="none" w="med" len="med"/>
+                      <a:tailEnd type="none" w="med" len="med"/>
+                    </a:lnL>
+                    <a:lnR w="12700" cap="flat" cmpd="sng" algn="ctr">
+                      <a:solidFill>
+                        <a:srgbClr val="CBCBCB"/>
+                      </a:solidFill>
+                      <a:prstDash val="solid"/>
+                      <a:round/>
+                      <a:headEnd type="none" w="med" len="med"/>
+                      <a:tailEnd type="none" w="med" len="med"/>
+                    </a:lnR>
+                    <a:lnT w="12700" cap="flat" cmpd="sng" algn="ctr">
+                      <a:solidFill>
+                        <a:srgbClr val="CBCBCB"/>
+                      </a:solidFill>
+                      <a:prstDash val="solid"/>
+                      <a:round/>
+                      <a:headEnd type="none" w="med" len="med"/>
+                      <a:tailEnd type="none" w="med" len="med"/>
+                    </a:lnT>
+                    <a:lnB w="12700" cap="flat" cmpd="sng" algn="ctr">
+                      <a:solidFill>
+                        <a:srgbClr val="CBCBCB"/>
+                      </a:solidFill>
+                      <a:prstDash val="solid"/>
+                      <a:round/>
+                      <a:headEnd type="none" w="med" len="med"/>
+                      <a:tailEnd type="none" w="med" len="med"/>
+                    </a:lnB>
+                  </a:tcPr>
+                </a:tc>
+                <a:tc>
+                  <a:txBody>
+                    <a:bodyPr/>
+                    <a:lstStyle/>
+                    <a:p>
+                      <a:pPr algn="r" indent="0" marL="0">
+                        <a:lnSpc>
+                          <a:spcPts val="2520"/>
+                        </a:lnSpc>
+                        <a:buNone/>
+                      </a:pPr>
+                      <a:r>
+                        <a:rPr lang="en-US" sz="1600" dirty="0">
+                          <a:solidFill>
+                            <a:srgbClr val="111111"/>
+                          </a:solidFill>
+                          <a:latin typeface="Arial" pitchFamily="34" charset="0"/>
+                          <a:ea typeface="Arial" pitchFamily="34" charset="-122"/>
+                          <a:cs typeface="Arial" pitchFamily="34" charset="-120"/>
+                        </a:rPr>
+                        <a:t>0.469</a:t>
+                      </a:r>
+                      <a:endParaRPr lang="en-US" sz="1800" dirty="0">
+                        <a:latin typeface="Arial" charset="0"/>
+                        <a:ea typeface="Arial" charset="0"/>
+                        <a:cs typeface="Arial" charset="0"/>
+                      </a:endParaRPr>
+                    </a:p>
+                  </a:txBody>
+                  <a:tcPr marL="80010" marR="80010" marT="36576" marB="36576" anchor="t">
+                    <a:lnL w="12700" cap="flat" cmpd="sng" algn="ctr">
+                      <a:solidFill>
+                        <a:srgbClr val="CBCBCB"/>
+                      </a:solidFill>
+                      <a:prstDash val="solid"/>
+                      <a:round/>
+                      <a:headEnd type="none" w="med" len="med"/>
+                      <a:tailEnd type="none" w="med" len="med"/>
+                    </a:lnL>
+                    <a:lnR w="12700" cap="flat" cmpd="sng" algn="ctr">
+                      <a:solidFill>
+                        <a:srgbClr val="CBCBCB"/>
+                      </a:solidFill>
+                      <a:prstDash val="solid"/>
+                      <a:round/>
+                      <a:headEnd type="none" w="med" len="med"/>
+                      <a:tailEnd type="none" w="med" len="med"/>
+                    </a:lnR>
+                    <a:lnT w="12700" cap="flat" cmpd="sng" algn="ctr">
+                      <a:solidFill>
+                        <a:srgbClr val="CBCBCB"/>
+                      </a:solidFill>
+                      <a:prstDash val="solid"/>
+                      <a:round/>
+                      <a:headEnd type="none" w="med" len="med"/>
+                      <a:tailEnd type="none" w="med" len="med"/>
+                    </a:lnT>
+                    <a:lnB w="12700" cap="flat" cmpd="sng" algn="ctr">
+                      <a:solidFill>
+                        <a:srgbClr val="CBCBCB"/>
+                      </a:solidFill>
+                      <a:prstDash val="solid"/>
+                      <a:round/>
+                      <a:headEnd type="none" w="med" len="med"/>
+                      <a:tailEnd type="none" w="med" len="med"/>
+                    </a:lnB>
+                  </a:tcPr>
+                </a:tc>
+                <a:tc>
+                  <a:txBody>
+                    <a:bodyPr/>
+                    <a:lstStyle/>
+                    <a:p>
+                      <a:pPr algn="r" indent="0" marL="0">
+                        <a:lnSpc>
+                          <a:spcPts val="2520"/>
+                        </a:lnSpc>
+                        <a:buNone/>
+                      </a:pPr>
+                      <a:r>
+                        <a:rPr lang="en-US" sz="1600" dirty="0">
+                          <a:solidFill>
+                            <a:srgbClr val="111111"/>
+                          </a:solidFill>
+                          <a:latin typeface="Arial" pitchFamily="34" charset="0"/>
+                          <a:ea typeface="Arial" pitchFamily="34" charset="-122"/>
+                          <a:cs typeface="Arial" pitchFamily="34" charset="-120"/>
+                        </a:rPr>
+                        <a:t>0.497</a:t>
+                      </a:r>
+                      <a:endParaRPr lang="en-US" sz="1800" dirty="0">
+                        <a:latin typeface="Arial" charset="0"/>
+                        <a:ea typeface="Arial" charset="0"/>
+                        <a:cs typeface="Arial" charset="0"/>
+                      </a:endParaRPr>
+                    </a:p>
+                  </a:txBody>
+                  <a:tcPr marL="80010" marR="80010" marT="36576" marB="36576" anchor="t">
+                    <a:lnL w="12700" cap="flat" cmpd="sng" algn="ctr">
+                      <a:solidFill>
+                        <a:srgbClr val="CBCBCB"/>
+                      </a:solidFill>
+                      <a:prstDash val="solid"/>
+                      <a:round/>
+                      <a:headEnd type="none" w="med" len="med"/>
+                      <a:tailEnd type="none" w="med" len="med"/>
+                    </a:lnL>
+                    <a:lnR w="12700" cap="flat" cmpd="sng" algn="ctr">
+                      <a:solidFill>
+                        <a:srgbClr val="CBCBCB"/>
+                      </a:solidFill>
+                      <a:prstDash val="solid"/>
+                      <a:round/>
+                      <a:headEnd type="none" w="med" len="med"/>
+                      <a:tailEnd type="none" w="med" len="med"/>
+                    </a:lnR>
+                    <a:lnT w="12700" cap="flat" cmpd="sng" algn="ctr">
+                      <a:solidFill>
+                        <a:srgbClr val="CBCBCB"/>
+                      </a:solidFill>
+                      <a:prstDash val="solid"/>
+                      <a:round/>
+                      <a:headEnd type="none" w="med" len="med"/>
+                      <a:tailEnd type="none" w="med" len="med"/>
+                    </a:lnT>
+                    <a:lnB w="12700" cap="flat" cmpd="sng" algn="ctr">
+                      <a:solidFill>
+                        <a:srgbClr val="CBCBCB"/>
+                      </a:solidFill>
+                      <a:prstDash val="solid"/>
+                      <a:round/>
+                      <a:headEnd type="none" w="med" len="med"/>
+                      <a:tailEnd type="none" w="med" len="med"/>
+                    </a:lnB>
+                  </a:tcPr>
+                </a:tc>
+              </a:tr>
+              <a:tr h="384048">
+                <a:tc>
+                  <a:txBody>
+                    <a:bodyPr/>
+                    <a:lstStyle/>
+                    <a:p>
+                      <a:pPr indent="0" marL="0">
+                        <a:lnSpc>
+                          <a:spcPts val="2520"/>
+                        </a:lnSpc>
+                        <a:buNone/>
+                      </a:pPr>
+                      <a:r>
+                        <a:rPr lang="en-US" sz="1600" dirty="0">
                           <a:solidFill>
                             <a:srgbClr val="111111"/>
                           </a:solidFill>
@@ -7279,7 +7921,7 @@
                       </a:endParaRPr>
                     </a:p>
                   </a:txBody>
-                  <a:tcPr marL="80010" marR="80010" marT="80010" marB="80010" anchor="t">
+                  <a:tcPr marL="80010" marR="80010" marT="36576" marB="36576" anchor="t">
                     <a:lnL w="12700" cap="flat" cmpd="sng" algn="ctr">
                       <a:solidFill>
                         <a:srgbClr val="CBCBCB"/>
@@ -7330,7 +7972,7 @@
                         <a:buNone/>
                       </a:pPr>
                       <a:r>
-                        <a:rPr lang="en-US" sz="1800" dirty="0">
+                        <a:rPr lang="en-US" sz="1600" dirty="0">
                           <a:solidFill>
                             <a:srgbClr val="111111"/>
                           </a:solidFill>
@@ -7347,7 +7989,7 @@
                       </a:endParaRPr>
                     </a:p>
                   </a:txBody>
-                  <a:tcPr marL="80010" marR="80010" marT="80010" marB="80010" anchor="t">
+                  <a:tcPr marL="80010" marR="80010" marT="36576" marB="36576" anchor="t">
                     <a:lnL w="12700" cap="flat" cmpd="sng" algn="ctr">
                       <a:solidFill>
                         <a:srgbClr val="CBCBCB"/>
@@ -7398,7 +8040,7 @@
                         <a:buNone/>
                       </a:pPr>
                       <a:r>
-                        <a:rPr lang="en-US" sz="1800" dirty="0">
+                        <a:rPr lang="en-US" sz="1600" dirty="0">
                           <a:solidFill>
                             <a:srgbClr val="111111"/>
                           </a:solidFill>
@@ -7415,7 +8057,419 @@
                       </a:endParaRPr>
                     </a:p>
                   </a:txBody>
-                  <a:tcPr marL="80010" marR="80010" marT="80010" marB="80010" anchor="t">
+                  <a:tcPr marL="80010" marR="80010" marT="36576" marB="36576" anchor="t">
+                    <a:lnL w="12700" cap="flat" cmpd="sng" algn="ctr">
+                      <a:solidFill>
+                        <a:srgbClr val="CBCBCB"/>
+                      </a:solidFill>
+                      <a:prstDash val="solid"/>
+                      <a:round/>
+                      <a:headEnd type="none" w="med" len="med"/>
+                      <a:tailEnd type="none" w="med" len="med"/>
+                    </a:lnL>
+                    <a:lnR w="12700" cap="flat" cmpd="sng" algn="ctr">
+                      <a:solidFill>
+                        <a:srgbClr val="CBCBCB"/>
+                      </a:solidFill>
+                      <a:prstDash val="solid"/>
+                      <a:round/>
+                      <a:headEnd type="none" w="med" len="med"/>
+                      <a:tailEnd type="none" w="med" len="med"/>
+                    </a:lnR>
+                    <a:lnT w="12700" cap="flat" cmpd="sng" algn="ctr">
+                      <a:solidFill>
+                        <a:srgbClr val="CBCBCB"/>
+                      </a:solidFill>
+                      <a:prstDash val="solid"/>
+                      <a:round/>
+                      <a:headEnd type="none" w="med" len="med"/>
+                      <a:tailEnd type="none" w="med" len="med"/>
+                    </a:lnT>
+                    <a:lnB w="12700" cap="flat" cmpd="sng" algn="ctr">
+                      <a:solidFill>
+                        <a:srgbClr val="CBCBCB"/>
+                      </a:solidFill>
+                      <a:prstDash val="solid"/>
+                      <a:round/>
+                      <a:headEnd type="none" w="med" len="med"/>
+                      <a:tailEnd type="none" w="med" len="med"/>
+                    </a:lnB>
+                  </a:tcPr>
+                </a:tc>
+              </a:tr>
+              <a:tr h="384048">
+                <a:tc>
+                  <a:txBody>
+                    <a:bodyPr/>
+                    <a:lstStyle/>
+                    <a:p>
+                      <a:pPr indent="0" marL="0">
+                        <a:lnSpc>
+                          <a:spcPts val="2520"/>
+                        </a:lnSpc>
+                        <a:buNone/>
+                      </a:pPr>
+                      <a:r>
+                        <a:rPr lang="en-US" sz="1600" dirty="0">
+                          <a:solidFill>
+                            <a:srgbClr val="111111"/>
+                          </a:solidFill>
+                          <a:latin typeface="Arial" pitchFamily="34" charset="0"/>
+                          <a:ea typeface="Arial" pitchFamily="34" charset="-122"/>
+                          <a:cs typeface="Arial" pitchFamily="34" charset="-120"/>
+                        </a:rPr>
+                        <a:t>Random undersampling</a:t>
+                      </a:r>
+                      <a:endParaRPr lang="en-US" sz="1800" dirty="0">
+                        <a:latin typeface="Arial" charset="0"/>
+                        <a:ea typeface="Arial" charset="0"/>
+                        <a:cs typeface="Arial" charset="0"/>
+                      </a:endParaRPr>
+                    </a:p>
+                  </a:txBody>
+                  <a:tcPr marL="80010" marR="80010" marT="36576" marB="36576" anchor="t">
+                    <a:lnL w="12700" cap="flat" cmpd="sng" algn="ctr">
+                      <a:solidFill>
+                        <a:srgbClr val="CBCBCB"/>
+                      </a:solidFill>
+                      <a:prstDash val="solid"/>
+                      <a:round/>
+                      <a:headEnd type="none" w="med" len="med"/>
+                      <a:tailEnd type="none" w="med" len="med"/>
+                    </a:lnL>
+                    <a:lnR w="12700" cap="flat" cmpd="sng" algn="ctr">
+                      <a:solidFill>
+                        <a:srgbClr val="CBCBCB"/>
+                      </a:solidFill>
+                      <a:prstDash val="solid"/>
+                      <a:round/>
+                      <a:headEnd type="none" w="med" len="med"/>
+                      <a:tailEnd type="none" w="med" len="med"/>
+                    </a:lnR>
+                    <a:lnT w="12700" cap="flat" cmpd="sng" algn="ctr">
+                      <a:solidFill>
+                        <a:srgbClr val="CBCBCB"/>
+                      </a:solidFill>
+                      <a:prstDash val="solid"/>
+                      <a:round/>
+                      <a:headEnd type="none" w="med" len="med"/>
+                      <a:tailEnd type="none" w="med" len="med"/>
+                    </a:lnT>
+                    <a:lnB w="12700" cap="flat" cmpd="sng" algn="ctr">
+                      <a:solidFill>
+                        <a:srgbClr val="CBCBCB"/>
+                      </a:solidFill>
+                      <a:prstDash val="solid"/>
+                      <a:round/>
+                      <a:headEnd type="none" w="med" len="med"/>
+                      <a:tailEnd type="none" w="med" len="med"/>
+                    </a:lnB>
+                  </a:tcPr>
+                </a:tc>
+                <a:tc>
+                  <a:txBody>
+                    <a:bodyPr/>
+                    <a:lstStyle/>
+                    <a:p>
+                      <a:pPr algn="r" indent="0" marL="0">
+                        <a:lnSpc>
+                          <a:spcPts val="2520"/>
+                        </a:lnSpc>
+                        <a:buNone/>
+                      </a:pPr>
+                      <a:r>
+                        <a:rPr lang="en-US" sz="1600" dirty="0">
+                          <a:solidFill>
+                            <a:srgbClr val="111111"/>
+                          </a:solidFill>
+                          <a:latin typeface="Arial" pitchFamily="34" charset="0"/>
+                          <a:ea typeface="Arial" pitchFamily="34" charset="-122"/>
+                          <a:cs typeface="Arial" pitchFamily="34" charset="-120"/>
+                        </a:rPr>
+                        <a:t>0.440</a:t>
+                      </a:r>
+                      <a:endParaRPr lang="en-US" sz="1800" dirty="0">
+                        <a:latin typeface="Arial" charset="0"/>
+                        <a:ea typeface="Arial" charset="0"/>
+                        <a:cs typeface="Arial" charset="0"/>
+                      </a:endParaRPr>
+                    </a:p>
+                  </a:txBody>
+                  <a:tcPr marL="80010" marR="80010" marT="36576" marB="36576" anchor="t">
+                    <a:lnL w="12700" cap="flat" cmpd="sng" algn="ctr">
+                      <a:solidFill>
+                        <a:srgbClr val="CBCBCB"/>
+                      </a:solidFill>
+                      <a:prstDash val="solid"/>
+                      <a:round/>
+                      <a:headEnd type="none" w="med" len="med"/>
+                      <a:tailEnd type="none" w="med" len="med"/>
+                    </a:lnL>
+                    <a:lnR w="12700" cap="flat" cmpd="sng" algn="ctr">
+                      <a:solidFill>
+                        <a:srgbClr val="CBCBCB"/>
+                      </a:solidFill>
+                      <a:prstDash val="solid"/>
+                      <a:round/>
+                      <a:headEnd type="none" w="med" len="med"/>
+                      <a:tailEnd type="none" w="med" len="med"/>
+                    </a:lnR>
+                    <a:lnT w="12700" cap="flat" cmpd="sng" algn="ctr">
+                      <a:solidFill>
+                        <a:srgbClr val="CBCBCB"/>
+                      </a:solidFill>
+                      <a:prstDash val="solid"/>
+                      <a:round/>
+                      <a:headEnd type="none" w="med" len="med"/>
+                      <a:tailEnd type="none" w="med" len="med"/>
+                    </a:lnT>
+                    <a:lnB w="12700" cap="flat" cmpd="sng" algn="ctr">
+                      <a:solidFill>
+                        <a:srgbClr val="CBCBCB"/>
+                      </a:solidFill>
+                      <a:prstDash val="solid"/>
+                      <a:round/>
+                      <a:headEnd type="none" w="med" len="med"/>
+                      <a:tailEnd type="none" w="med" len="med"/>
+                    </a:lnB>
+                  </a:tcPr>
+                </a:tc>
+                <a:tc>
+                  <a:txBody>
+                    <a:bodyPr/>
+                    <a:lstStyle/>
+                    <a:p>
+                      <a:pPr algn="r" indent="0" marL="0">
+                        <a:lnSpc>
+                          <a:spcPts val="2520"/>
+                        </a:lnSpc>
+                        <a:buNone/>
+                      </a:pPr>
+                      <a:r>
+                        <a:rPr lang="en-US" sz="1600" dirty="0">
+                          <a:solidFill>
+                            <a:srgbClr val="111111"/>
+                          </a:solidFill>
+                          <a:latin typeface="Arial" pitchFamily="34" charset="0"/>
+                          <a:ea typeface="Arial" pitchFamily="34" charset="-122"/>
+                          <a:cs typeface="Arial" pitchFamily="34" charset="-120"/>
+                        </a:rPr>
+                        <a:t>0.490</a:t>
+                      </a:r>
+                      <a:endParaRPr lang="en-US" sz="1800" dirty="0">
+                        <a:latin typeface="Arial" charset="0"/>
+                        <a:ea typeface="Arial" charset="0"/>
+                        <a:cs typeface="Arial" charset="0"/>
+                      </a:endParaRPr>
+                    </a:p>
+                  </a:txBody>
+                  <a:tcPr marL="80010" marR="80010" marT="36576" marB="36576" anchor="t">
+                    <a:lnL w="12700" cap="flat" cmpd="sng" algn="ctr">
+                      <a:solidFill>
+                        <a:srgbClr val="CBCBCB"/>
+                      </a:solidFill>
+                      <a:prstDash val="solid"/>
+                      <a:round/>
+                      <a:headEnd type="none" w="med" len="med"/>
+                      <a:tailEnd type="none" w="med" len="med"/>
+                    </a:lnL>
+                    <a:lnR w="12700" cap="flat" cmpd="sng" algn="ctr">
+                      <a:solidFill>
+                        <a:srgbClr val="CBCBCB"/>
+                      </a:solidFill>
+                      <a:prstDash val="solid"/>
+                      <a:round/>
+                      <a:headEnd type="none" w="med" len="med"/>
+                      <a:tailEnd type="none" w="med" len="med"/>
+                    </a:lnR>
+                    <a:lnT w="12700" cap="flat" cmpd="sng" algn="ctr">
+                      <a:solidFill>
+                        <a:srgbClr val="CBCBCB"/>
+                      </a:solidFill>
+                      <a:prstDash val="solid"/>
+                      <a:round/>
+                      <a:headEnd type="none" w="med" len="med"/>
+                      <a:tailEnd type="none" w="med" len="med"/>
+                    </a:lnT>
+                    <a:lnB w="12700" cap="flat" cmpd="sng" algn="ctr">
+                      <a:solidFill>
+                        <a:srgbClr val="CBCBCB"/>
+                      </a:solidFill>
+                      <a:prstDash val="solid"/>
+                      <a:round/>
+                      <a:headEnd type="none" w="med" len="med"/>
+                      <a:tailEnd type="none" w="med" len="med"/>
+                    </a:lnB>
+                  </a:tcPr>
+                </a:tc>
+              </a:tr>
+              <a:tr h="384048">
+                <a:tc>
+                  <a:txBody>
+                    <a:bodyPr/>
+                    <a:lstStyle/>
+                    <a:p>
+                      <a:pPr indent="0" marL="0">
+                        <a:lnSpc>
+                          <a:spcPts val="2520"/>
+                        </a:lnSpc>
+                        <a:buNone/>
+                      </a:pPr>
+                      <a:r>
+                        <a:rPr lang="en-US" sz="1600" dirty="0">
+                          <a:solidFill>
+                            <a:srgbClr val="111111"/>
+                          </a:solidFill>
+                          <a:latin typeface="Arial" pitchFamily="34" charset="0"/>
+                          <a:ea typeface="Arial" pitchFamily="34" charset="-122"/>
+                          <a:cs typeface="Arial" pitchFamily="34" charset="-120"/>
+                        </a:rPr>
+                        <a:t>Cluster centroids</a:t>
+                      </a:r>
+                      <a:endParaRPr lang="en-US" sz="1800" dirty="0">
+                        <a:latin typeface="Arial" charset="0"/>
+                        <a:ea typeface="Arial" charset="0"/>
+                        <a:cs typeface="Arial" charset="0"/>
+                      </a:endParaRPr>
+                    </a:p>
+                  </a:txBody>
+                  <a:tcPr marL="80010" marR="80010" marT="36576" marB="36576" anchor="t">
+                    <a:lnL w="12700" cap="flat" cmpd="sng" algn="ctr">
+                      <a:solidFill>
+                        <a:srgbClr val="CBCBCB"/>
+                      </a:solidFill>
+                      <a:prstDash val="solid"/>
+                      <a:round/>
+                      <a:headEnd type="none" w="med" len="med"/>
+                      <a:tailEnd type="none" w="med" len="med"/>
+                    </a:lnL>
+                    <a:lnR w="12700" cap="flat" cmpd="sng" algn="ctr">
+                      <a:solidFill>
+                        <a:srgbClr val="CBCBCB"/>
+                      </a:solidFill>
+                      <a:prstDash val="solid"/>
+                      <a:round/>
+                      <a:headEnd type="none" w="med" len="med"/>
+                      <a:tailEnd type="none" w="med" len="med"/>
+                    </a:lnR>
+                    <a:lnT w="12700" cap="flat" cmpd="sng" algn="ctr">
+                      <a:solidFill>
+                        <a:srgbClr val="CBCBCB"/>
+                      </a:solidFill>
+                      <a:prstDash val="solid"/>
+                      <a:round/>
+                      <a:headEnd type="none" w="med" len="med"/>
+                      <a:tailEnd type="none" w="med" len="med"/>
+                    </a:lnT>
+                    <a:lnB w="12700" cap="flat" cmpd="sng" algn="ctr">
+                      <a:solidFill>
+                        <a:srgbClr val="CBCBCB"/>
+                      </a:solidFill>
+                      <a:prstDash val="solid"/>
+                      <a:round/>
+                      <a:headEnd type="none" w="med" len="med"/>
+                      <a:tailEnd type="none" w="med" len="med"/>
+                    </a:lnB>
+                  </a:tcPr>
+                </a:tc>
+                <a:tc>
+                  <a:txBody>
+                    <a:bodyPr/>
+                    <a:lstStyle/>
+                    <a:p>
+                      <a:pPr algn="r" indent="0" marL="0">
+                        <a:lnSpc>
+                          <a:spcPts val="2520"/>
+                        </a:lnSpc>
+                        <a:buNone/>
+                      </a:pPr>
+                      <a:r>
+                        <a:rPr lang="en-US" sz="1600" dirty="0">
+                          <a:solidFill>
+                            <a:srgbClr val="111111"/>
+                          </a:solidFill>
+                          <a:latin typeface="Arial" pitchFamily="34" charset="0"/>
+                          <a:ea typeface="Arial" pitchFamily="34" charset="-122"/>
+                          <a:cs typeface="Arial" pitchFamily="34" charset="-120"/>
+                        </a:rPr>
+                        <a:t>0.203</a:t>
+                      </a:r>
+                      <a:endParaRPr lang="en-US" sz="1800" dirty="0">
+                        <a:latin typeface="Arial" charset="0"/>
+                        <a:ea typeface="Arial" charset="0"/>
+                        <a:cs typeface="Arial" charset="0"/>
+                      </a:endParaRPr>
+                    </a:p>
+                  </a:txBody>
+                  <a:tcPr marL="80010" marR="80010" marT="36576" marB="36576" anchor="t">
+                    <a:lnL w="12700" cap="flat" cmpd="sng" algn="ctr">
+                      <a:solidFill>
+                        <a:srgbClr val="CBCBCB"/>
+                      </a:solidFill>
+                      <a:prstDash val="solid"/>
+                      <a:round/>
+                      <a:headEnd type="none" w="med" len="med"/>
+                      <a:tailEnd type="none" w="med" len="med"/>
+                    </a:lnL>
+                    <a:lnR w="12700" cap="flat" cmpd="sng" algn="ctr">
+                      <a:solidFill>
+                        <a:srgbClr val="CBCBCB"/>
+                      </a:solidFill>
+                      <a:prstDash val="solid"/>
+                      <a:round/>
+                      <a:headEnd type="none" w="med" len="med"/>
+                      <a:tailEnd type="none" w="med" len="med"/>
+                    </a:lnR>
+                    <a:lnT w="12700" cap="flat" cmpd="sng" algn="ctr">
+                      <a:solidFill>
+                        <a:srgbClr val="CBCBCB"/>
+                      </a:solidFill>
+                      <a:prstDash val="solid"/>
+                      <a:round/>
+                      <a:headEnd type="none" w="med" len="med"/>
+                      <a:tailEnd type="none" w="med" len="med"/>
+                    </a:lnT>
+                    <a:lnB w="12700" cap="flat" cmpd="sng" algn="ctr">
+                      <a:solidFill>
+                        <a:srgbClr val="CBCBCB"/>
+                      </a:solidFill>
+                      <a:prstDash val="solid"/>
+                      <a:round/>
+                      <a:headEnd type="none" w="med" len="med"/>
+                      <a:tailEnd type="none" w="med" len="med"/>
+                    </a:lnB>
+                  </a:tcPr>
+                </a:tc>
+                <a:tc>
+                  <a:txBody>
+                    <a:bodyPr/>
+                    <a:lstStyle/>
+                    <a:p>
+                      <a:pPr algn="r" indent="0" marL="0">
+                        <a:lnSpc>
+                          <a:spcPts val="2520"/>
+                        </a:lnSpc>
+                        <a:buNone/>
+                      </a:pPr>
+                      <a:r>
+                        <a:rPr lang="en-US" sz="1600" dirty="0">
+                          <a:solidFill>
+                            <a:srgbClr val="111111"/>
+                          </a:solidFill>
+                          <a:latin typeface="Arial" pitchFamily="34" charset="0"/>
+                          <a:ea typeface="Arial" pitchFamily="34" charset="-122"/>
+                          <a:cs typeface="Arial" pitchFamily="34" charset="-120"/>
+                        </a:rPr>
+                        <a:t>0.209</a:t>
+                      </a:r>
+                      <a:endParaRPr lang="en-US" sz="1800" dirty="0">
+                        <a:latin typeface="Arial" charset="0"/>
+                        <a:ea typeface="Arial" charset="0"/>
+                        <a:cs typeface="Arial" charset="0"/>
+                      </a:endParaRPr>
+                    </a:p>
+                  </a:txBody>
+                  <a:tcPr marL="80010" marR="80010" marT="36576" marB="36576" anchor="t">
                     <a:lnL w="12700" cap="flat" cmpd="sng" algn="ctr">
                       <a:solidFill>
                         <a:srgbClr val="CBCBCB"/>
@@ -7467,7 +8521,7 @@
         </p:nvSpPr>
         <p:spPr>
           <a:xfrm>
-            <a:off x="812800" y="4548584"/>
+            <a:off x="812800" y="5257800"/>
             <a:ext cx="10883392" cy="660400"/>
           </a:xfrm>
           <a:prstGeom prst="rect">
@@ -7489,7 +8543,7 @@
               <a:buNone/>
             </a:pPr>
             <a:r>
-              <a:rPr lang="en-US" sz="1800" dirty="0">
+              <a:rPr lang="en-US" sz="1800" dirty="0" b="1">
                 <a:solidFill>
                   <a:srgbClr val="111111"/>
                 </a:solidFill>
@@ -7497,18 +8551,7 @@
                 <a:ea typeface="Arial" pitchFamily="34" charset="-122"/>
                 <a:cs typeface="Arial" pitchFamily="34" charset="-120"/>
               </a:rPr>
-              <a:t>What really matters is </a:t>
-            </a:r>
-            <a:r>
-              <a:rPr lang="en-US" sz="1800" b="1" dirty="0">
-                <a:solidFill>
-                  <a:srgbClr val="111111"/>
-                </a:solidFill>
-                <a:latin typeface="Arial" pitchFamily="34" charset="0"/>
-                <a:ea typeface="Arial" pitchFamily="34" charset="-122"/>
-                <a:cs typeface="Arial" pitchFamily="34" charset="-120"/>
-              </a:rPr>
-              <a:t>not leaving the threshold at 0.5</a:t>
+              <a:t>Don’t leave the threshold at 0.5.</a:t>
             </a:r>
             <a:r>
               <a:rPr lang="en-US" sz="1800" dirty="0">
@@ -7519,10 +8562,10 @@
                 <a:ea typeface="Arial" pitchFamily="34" charset="-122"/>
                 <a:cs typeface="Arial" pitchFamily="34" charset="-120"/>
               </a:rPr>
-              <a:t>. I picked </a:t>
+              <a:t> F1 is best at 0.65. A missed yes costs more than a wasted call, so I went one step lower to </a:t>
             </a:r>
             <a:r>
-              <a:rPr lang="en-US" sz="1800" b="1" dirty="0">
+              <a:rPr lang="en-US" sz="1800" dirty="0" b="1">
                 <a:solidFill>
                   <a:srgbClr val="111111"/>
                 </a:solidFill>
@@ -7541,7 +8584,7 @@
                 <a:ea typeface="Arial" pitchFamily="34" charset="-122"/>
                 <a:cs typeface="Arial" pitchFamily="34" charset="-120"/>
               </a:rPr>
-              <a:t>: the lowest threshold within the fold spread of the best F1, because a missed yes costs more than a wasted call.</a:t>
+              <a:t>: it finds more subscribers, and F1 stays just as good.</a:t>
             </a:r>
             <a:endParaRPr lang="en-US" sz="1800" dirty="0"/>
           </a:p>

--- a/presentation/Bank Marketing Who Subscribes.pptx
+++ b/presentation/Bank Marketing Who Subscribes.pptx
@@ -9142,7 +9142,7 @@
         <p:spPr>
           <a:xfrm>
             <a:off x="812800" y="4356100"/>
-            <a:ext cx="10883392" cy="774700"/>
+            <a:ext cx="10883392" cy="777240"/>
           </a:xfrm>
           <a:prstGeom prst="rect">
             <a:avLst/>
@@ -9216,6 +9216,50 @@
                 <a:cs typeface="Arial" pitchFamily="34" charset="-120"/>
               </a:rPr>
               <a:t>. Calling everyone: 100% of the calls, and 89% of them are wasted.</a:t>
+            </a:r>
+            <a:endParaRPr lang="en-US" sz="2200" dirty="0"/>
+          </a:p>
+        </p:txBody>
+      </p:sp>
+      <p:sp>
+        <p:nvSpPr>
+          <p:cNvPr id="16" name="Text 14"/>
+          <p:cNvSpPr/>
+          <p:nvPr/>
+        </p:nvSpPr>
+        <p:spPr>
+          <a:xfrm>
+            <a:off x="812800" y="5349240"/>
+            <a:ext cx="10883392" cy="685800"/>
+          </a:xfrm>
+          <a:prstGeom prst="rect">
+            <a:avLst/>
+          </a:prstGeom>
+          <a:noFill/>
+          <a:ln/>
+        </p:spPr>
+        <p:txBody>
+          <a:bodyPr wrap="square" lIns="0" tIns="0" rIns="0" bIns="0" rtlCol="0" anchor="t">
+            <a:normAutofit/>
+          </a:bodyPr>
+          <a:lstStyle/>
+          <a:p>
+            <a:pPr algn="l" indent="0" marL="0">
+              <a:lnSpc>
+                <a:spcPts val="2970"/>
+              </a:lnSpc>
+              <a:buNone/>
+            </a:pPr>
+            <a:r>
+              <a:rPr lang="en-US" sz="1600" dirty="0">
+                <a:solidFill>
+                  <a:srgbClr val="555555"/>
+                </a:solidFill>
+                <a:latin typeface="Arial" pitchFamily="34" charset="0"/>
+                <a:ea typeface="Arial" pitchFamily="34" charset="-122"/>
+                <a:cs typeface="Arial" pitchFamily="34" charset="-120"/>
+              </a:rPr>
+              <a:t>How: the test set has 8,236 clients, 928 of them subscribers. The model calls 1,248 of them (15%), and 565 of those subscribe: 565 / 928 = 61%. Calling everyone, only 11.3% say yes, so 89% of the calls are wasted.</a:t>
             </a:r>
             <a:endParaRPr lang="en-US" sz="2200" dirty="0"/>
           </a:p>
